--- a/Fase 2/Evidencias Proyecto/Presentación Proyecto.pptx
+++ b/Fase 2/Evidencias Proyecto/Presentación Proyecto.pptx
@@ -17303,8 +17303,8 @@
         </p:nvSpPr>
         <p:spPr>
           <a:xfrm flipH="false" flipV="false" rot="0">
-            <a:off x="520478" y="1175153"/>
-            <a:ext cx="16542224" cy="8891445"/>
+            <a:off x="1312694" y="1606979"/>
+            <a:ext cx="14681570" cy="8258383"/>
           </a:xfrm>
           <a:custGeom>
             <a:avLst/>
@@ -17313,18 +17313,18 @@
             <a:cxnLst/>
             <a:rect r="r" b="b" t="t" l="l"/>
             <a:pathLst>
-              <a:path h="8891445" w="16542224">
+              <a:path h="8258383" w="14681570">
                 <a:moveTo>
                   <a:pt x="0" y="0"/>
                 </a:moveTo>
                 <a:lnTo>
-                  <a:pt x="16542224" y="0"/>
-                </a:lnTo>
-                <a:lnTo>
-                  <a:pt x="16542224" y="8891445"/>
-                </a:lnTo>
-                <a:lnTo>
-                  <a:pt x="0" y="8891445"/>
+                  <a:pt x="14681569" y="0"/>
+                </a:lnTo>
+                <a:lnTo>
+                  <a:pt x="14681569" y="8258383"/>
+                </a:lnTo>
+                <a:lnTo>
+                  <a:pt x="0" y="8258383"/>
                 </a:lnTo>
                 <a:lnTo>
                   <a:pt x="0" y="0"/>
